--- a/analyses-project/guidance/W2_Readers_and_the_report.pptx
+++ b/analyses-project/guidance/W2_Readers_and_the_report.pptx
@@ -6656,51 +6656,7 @@
                 <a:ea typeface="Calibri" pitchFamily="34" charset="-122"/>
                 <a:cs typeface="Calibri" pitchFamily="34" charset="-120"/>
               </a:rPr>
-              <a:t>Analysis slides: </a:t>
-            </a:r>
-            <a:r>
-              <a:rPr lang="en-US" sz="1350" b="1" dirty="0">
-                <a:solidFill>
-                  <a:srgbClr val="222B36"/>
-                </a:solidFill>
-                <a:latin typeface="Calibri" pitchFamily="34" charset="0"/>
-                <a:ea typeface="Calibri" pitchFamily="34" charset="-122"/>
-                <a:cs typeface="Calibri" pitchFamily="34" charset="-120"/>
-              </a:rPr>
-              <a:t>02 Climatology and anomalies</a:t>
-            </a:r>
-            <a:r>
-              <a:rPr lang="en-US" sz="1350" dirty="0">
-                <a:solidFill>
-                  <a:srgbClr val="222B36"/>
-                </a:solidFill>
-                <a:latin typeface="Calibri" pitchFamily="34" charset="0"/>
-                <a:ea typeface="Calibri" pitchFamily="34" charset="-122"/>
-                <a:cs typeface="Calibri" pitchFamily="34" charset="-120"/>
-              </a:rPr>
-              <a:t> and </a:t>
-            </a:r>
-            <a:r>
-              <a:rPr lang="en-US" sz="1350" b="1" dirty="0">
-                <a:solidFill>
-                  <a:srgbClr val="222B36"/>
-                </a:solidFill>
-                <a:latin typeface="Calibri" pitchFamily="34" charset="0"/>
-                <a:ea typeface="Calibri" pitchFamily="34" charset="-122"/>
-                <a:cs typeface="Calibri" pitchFamily="34" charset="-120"/>
-              </a:rPr>
-              <a:t>03 Finding an ENSO signal</a:t>
-            </a:r>
-            <a:r>
-              <a:rPr lang="en-US" sz="1350" dirty="0">
-                <a:solidFill>
-                  <a:srgbClr val="222B36"/>
-                </a:solidFill>
-                <a:latin typeface="Calibri" pitchFamily="34" charset="0"/>
-                <a:ea typeface="Calibri" pitchFamily="34" charset="-122"/>
-                <a:cs typeface="Calibri" pitchFamily="34" charset="-120"/>
-              </a:rPr>
-              <a:t>.</a:t>
+              <a:t>Each section opens with a short explanation: read it before you run the cells.</a:t>
             </a:r>
             <a:endParaRPr lang="en-US" sz="1350" dirty="0"/>
           </a:p>
